--- a/instructor/slides/pptx/sections/06-json-xml-csv.pptx
+++ b/instructor/slides/pptx/sections/06-json-xml-csv.pptx
@@ -3740,8 +3740,8 @@
         </p:nvSpPr>
         <p:spPr>
           <a:xfrm>
-            <a:off x="640080" y="1920240"/>
-            <a:ext cx="10972800" cy="1463040"/>
+            <a:off x="640080" y="1828800"/>
+            <a:ext cx="6675120" cy="1645920"/>
           </a:xfrm>
           <a:prstGeom prst="rect">
             <a:avLst/>
@@ -3755,7 +3755,7 @@
           <a:lstStyle/>
           <a:p>
             <a:r>
-              <a:rPr sz="4400" b="1">
+              <a:rPr sz="4000" b="1">
                 <a:solidFill>
                   <a:srgbClr val="FFFFFF"/>
                 </a:solidFill>
@@ -3774,8 +3774,8 @@
         </p:nvSpPr>
         <p:spPr>
           <a:xfrm>
-            <a:off x="640080" y="3657600"/>
-            <a:ext cx="10789920" cy="1097280"/>
+            <a:off x="640080" y="3794760"/>
+            <a:ext cx="6675120" cy="1097280"/>
           </a:xfrm>
           <a:prstGeom prst="rect">
             <a:avLst/>
@@ -3789,7 +3789,7 @@
           <a:lstStyle/>
           <a:p>
             <a:r>
-              <a:rPr sz="2000" b="0">
+              <a:rPr sz="1800" b="0">
                 <a:solidFill>
                   <a:srgbClr val="B7CBDE"/>
                 </a:solidFill>
@@ -3800,6 +3800,30 @@
           </a:p>
         </p:txBody>
       </p:sp>
+      <p:pic>
+        <p:nvPicPr>
+          <p:cNvPr id="6" name="Picture 5" descr="dw-mapping.jpg"/>
+          <p:cNvPicPr>
+            <a:picLocks noChangeAspect="1"/>
+          </p:cNvPicPr>
+          <p:nvPr/>
+        </p:nvPicPr>
+        <p:blipFill>
+          <a:blip r:embed="rId2"/>
+          <a:stretch>
+            <a:fillRect/>
+          </a:stretch>
+        </p:blipFill>
+        <p:spPr>
+          <a:xfrm>
+            <a:off x="7452360" y="1325880"/>
+            <a:ext cx="4160520" cy="4160520"/>
+          </a:xfrm>
+          <a:prstGeom prst="rect">
+            <a:avLst/>
+          </a:prstGeom>
+        </p:spPr>
+      </p:pic>
     </p:spTree>
   </p:cSld>
   <p:clrMapOvr>
@@ -3903,8 +3927,8 @@
         </p:nvSpPr>
         <p:spPr>
           <a:xfrm>
-            <a:off x="640080" y="685800"/>
-            <a:ext cx="10972800" cy="1463040"/>
+            <a:off x="640080" y="658368"/>
+            <a:ext cx="7863840" cy="1645920"/>
           </a:xfrm>
           <a:prstGeom prst="rect">
             <a:avLst/>
@@ -3918,7 +3942,7 @@
           <a:lstStyle/>
           <a:p>
             <a:r>
-              <a:rPr sz="3200" b="1">
+              <a:rPr sz="3000" b="1">
                 <a:solidFill>
                   <a:srgbClr val="FFFFFF"/>
                 </a:solidFill>
@@ -3937,8 +3961,8 @@
         </p:nvSpPr>
         <p:spPr>
           <a:xfrm>
-            <a:off x="777240" y="2286000"/>
-            <a:ext cx="10607040" cy="4754880"/>
+            <a:off x="777240" y="2331720"/>
+            <a:ext cx="7498079" cy="4754880"/>
           </a:xfrm>
           <a:prstGeom prst="rect">
             <a:avLst/>
@@ -3957,7 +3981,7 @@
               </a:spcAft>
             </a:pPr>
             <a:r>
-              <a:rPr sz="2400" b="0">
+              <a:rPr sz="2200" b="0">
                 <a:solidFill>
                   <a:srgbClr val="FFFFFF"/>
                 </a:solidFill>
@@ -3973,7 +3997,7 @@
               </a:spcAft>
             </a:pPr>
             <a:r>
-              <a:rPr sz="2400" b="0">
+              <a:rPr sz="2200" b="0">
                 <a:solidFill>
                   <a:srgbClr val="FFFFFF"/>
                 </a:solidFill>
@@ -3989,7 +4013,7 @@
               </a:spcAft>
             </a:pPr>
             <a:r>
-              <a:rPr sz="2400" b="0">
+              <a:rPr sz="2200" b="0">
                 <a:solidFill>
                   <a:srgbClr val="FFFFFF"/>
                 </a:solidFill>
@@ -4000,6 +4024,30 @@
           </a:p>
         </p:txBody>
       </p:sp>
+      <p:pic>
+        <p:nvPicPr>
+          <p:cNvPr id="6" name="Picture 5" descr="dw-mapping.jpg"/>
+          <p:cNvPicPr>
+            <a:picLocks noChangeAspect="1"/>
+          </p:cNvPicPr>
+          <p:nvPr/>
+        </p:nvPicPr>
+        <p:blipFill>
+          <a:blip r:embed="rId2"/>
+          <a:stretch>
+            <a:fillRect/>
+          </a:stretch>
+        </p:blipFill>
+        <p:spPr>
+          <a:xfrm>
+            <a:off x="8732520" y="2057400"/>
+            <a:ext cx="2880360" cy="2880360"/>
+          </a:xfrm>
+          <a:prstGeom prst="rect">
+            <a:avLst/>
+          </a:prstGeom>
+        </p:spPr>
+      </p:pic>
     </p:spTree>
   </p:cSld>
   <p:clrMapOvr>
@@ -4103,8 +4151,8 @@
         </p:nvSpPr>
         <p:spPr>
           <a:xfrm>
-            <a:off x="640080" y="685800"/>
-            <a:ext cx="10972800" cy="1463040"/>
+            <a:off x="640080" y="658368"/>
+            <a:ext cx="7863840" cy="1645920"/>
           </a:xfrm>
           <a:prstGeom prst="rect">
             <a:avLst/>
@@ -4118,7 +4166,7 @@
           <a:lstStyle/>
           <a:p>
             <a:r>
-              <a:rPr sz="3200" b="1">
+              <a:rPr sz="3000" b="1">
                 <a:solidFill>
                   <a:srgbClr val="FFFFFF"/>
                 </a:solidFill>
@@ -4137,8 +4185,8 @@
         </p:nvSpPr>
         <p:spPr>
           <a:xfrm>
-            <a:off x="777240" y="2286000"/>
-            <a:ext cx="10607040" cy="4754880"/>
+            <a:off x="777240" y="2331720"/>
+            <a:ext cx="7498079" cy="4754880"/>
           </a:xfrm>
           <a:prstGeom prst="rect">
             <a:avLst/>
@@ -4157,7 +4205,7 @@
               </a:spcAft>
             </a:pPr>
             <a:r>
-              <a:rPr sz="2400" b="0">
+              <a:rPr sz="2200" b="0">
                 <a:solidFill>
                   <a:srgbClr val="FFFFFF"/>
                 </a:solidFill>
@@ -4173,7 +4221,7 @@
               </a:spcAft>
             </a:pPr>
             <a:r>
-              <a:rPr sz="2400" b="0">
+              <a:rPr sz="2200" b="0">
                 <a:solidFill>
                   <a:srgbClr val="FFFFFF"/>
                 </a:solidFill>
@@ -4184,6 +4232,30 @@
           </a:p>
         </p:txBody>
       </p:sp>
+      <p:pic>
+        <p:nvPicPr>
+          <p:cNvPr id="6" name="Picture 5" descr="dw-mapping.jpg"/>
+          <p:cNvPicPr>
+            <a:picLocks noChangeAspect="1"/>
+          </p:cNvPicPr>
+          <p:nvPr/>
+        </p:nvPicPr>
+        <p:blipFill>
+          <a:blip r:embed="rId2"/>
+          <a:stretch>
+            <a:fillRect/>
+          </a:stretch>
+        </p:blipFill>
+        <p:spPr>
+          <a:xfrm>
+            <a:off x="8732520" y="2057400"/>
+            <a:ext cx="2880360" cy="2880360"/>
+          </a:xfrm>
+          <a:prstGeom prst="rect">
+            <a:avLst/>
+          </a:prstGeom>
+        </p:spPr>
+      </p:pic>
     </p:spTree>
   </p:cSld>
   <p:clrMapOvr>
@@ -4287,8 +4359,8 @@
         </p:nvSpPr>
         <p:spPr>
           <a:xfrm>
-            <a:off x="640080" y="685800"/>
-            <a:ext cx="10972800" cy="1463040"/>
+            <a:off x="640080" y="658368"/>
+            <a:ext cx="7863840" cy="1645920"/>
           </a:xfrm>
           <a:prstGeom prst="rect">
             <a:avLst/>
@@ -4302,7 +4374,7 @@
           <a:lstStyle/>
           <a:p>
             <a:r>
-              <a:rPr sz="3200" b="1">
+              <a:rPr sz="3000" b="1">
                 <a:solidFill>
                   <a:srgbClr val="FFFFFF"/>
                 </a:solidFill>
@@ -4321,8 +4393,8 @@
         </p:nvSpPr>
         <p:spPr>
           <a:xfrm>
-            <a:off x="777240" y="2286000"/>
-            <a:ext cx="10607040" cy="4754880"/>
+            <a:off x="777240" y="2331720"/>
+            <a:ext cx="7498079" cy="4754880"/>
           </a:xfrm>
           <a:prstGeom prst="rect">
             <a:avLst/>
@@ -4341,7 +4413,7 @@
               </a:spcAft>
             </a:pPr>
             <a:r>
-              <a:rPr sz="2400" b="0">
+              <a:rPr sz="2200" b="0">
                 <a:solidFill>
                   <a:srgbClr val="FFFFFF"/>
                 </a:solidFill>
@@ -4357,7 +4429,7 @@
               </a:spcAft>
             </a:pPr>
             <a:r>
-              <a:rPr sz="2400" b="0">
+              <a:rPr sz="2200" b="0">
                 <a:solidFill>
                   <a:srgbClr val="FFFFFF"/>
                 </a:solidFill>
@@ -4373,7 +4445,7 @@
               </a:spcAft>
             </a:pPr>
             <a:r>
-              <a:rPr sz="2400" b="0">
+              <a:rPr sz="2200" b="0">
                 <a:solidFill>
                   <a:srgbClr val="FFFFFF"/>
                 </a:solidFill>
@@ -4389,7 +4461,7 @@
               </a:spcAft>
             </a:pPr>
             <a:r>
-              <a:rPr sz="2400" b="0">
+              <a:rPr sz="2200" b="0">
                 <a:solidFill>
                   <a:srgbClr val="FFFFFF"/>
                 </a:solidFill>
@@ -4400,6 +4472,30 @@
           </a:p>
         </p:txBody>
       </p:sp>
+      <p:pic>
+        <p:nvPicPr>
+          <p:cNvPr id="6" name="Picture 5" descr="dw-mapping.jpg"/>
+          <p:cNvPicPr>
+            <a:picLocks noChangeAspect="1"/>
+          </p:cNvPicPr>
+          <p:nvPr/>
+        </p:nvPicPr>
+        <p:blipFill>
+          <a:blip r:embed="rId2"/>
+          <a:stretch>
+            <a:fillRect/>
+          </a:stretch>
+        </p:blipFill>
+        <p:spPr>
+          <a:xfrm>
+            <a:off x="8732520" y="2057400"/>
+            <a:ext cx="2880360" cy="2880360"/>
+          </a:xfrm>
+          <a:prstGeom prst="rect">
+            <a:avLst/>
+          </a:prstGeom>
+        </p:spPr>
+      </p:pic>
     </p:spTree>
   </p:cSld>
   <p:clrMapOvr>
@@ -4503,8 +4599,8 @@
         </p:nvSpPr>
         <p:spPr>
           <a:xfrm>
-            <a:off x="640080" y="685800"/>
-            <a:ext cx="10972800" cy="1463040"/>
+            <a:off x="640080" y="658368"/>
+            <a:ext cx="7863840" cy="1645920"/>
           </a:xfrm>
           <a:prstGeom prst="rect">
             <a:avLst/>
@@ -4518,7 +4614,7 @@
           <a:lstStyle/>
           <a:p>
             <a:r>
-              <a:rPr sz="3200" b="1">
+              <a:rPr sz="3000" b="1">
                 <a:solidFill>
                   <a:srgbClr val="FFFFFF"/>
                 </a:solidFill>
@@ -4537,8 +4633,8 @@
         </p:nvSpPr>
         <p:spPr>
           <a:xfrm>
-            <a:off x="777240" y="2286000"/>
-            <a:ext cx="10607040" cy="4754880"/>
+            <a:off x="777240" y="2331720"/>
+            <a:ext cx="7498079" cy="4754880"/>
           </a:xfrm>
           <a:prstGeom prst="rect">
             <a:avLst/>
@@ -4557,7 +4653,7 @@
               </a:spcAft>
             </a:pPr>
             <a:r>
-              <a:rPr sz="2400" b="0">
+              <a:rPr sz="2200" b="0">
                 <a:solidFill>
                   <a:srgbClr val="FFFFFF"/>
                 </a:solidFill>
@@ -4573,7 +4669,7 @@
               </a:spcAft>
             </a:pPr>
             <a:r>
-              <a:rPr sz="2400" b="0">
+              <a:rPr sz="2200" b="0">
                 <a:solidFill>
                   <a:srgbClr val="FFFFFF"/>
                 </a:solidFill>
@@ -4589,7 +4685,7 @@
               </a:spcAft>
             </a:pPr>
             <a:r>
-              <a:rPr sz="2400" b="0">
+              <a:rPr sz="2200" b="0">
                 <a:solidFill>
                   <a:srgbClr val="FFFFFF"/>
                 </a:solidFill>
@@ -4605,7 +4701,7 @@
               </a:spcAft>
             </a:pPr>
             <a:r>
-              <a:rPr sz="2400" b="0">
+              <a:rPr sz="2200" b="0">
                 <a:solidFill>
                   <a:srgbClr val="FFFFFF"/>
                 </a:solidFill>
@@ -4616,6 +4712,30 @@
           </a:p>
         </p:txBody>
       </p:sp>
+      <p:pic>
+        <p:nvPicPr>
+          <p:cNvPr id="6" name="Picture 5" descr="dw-mapping.jpg"/>
+          <p:cNvPicPr>
+            <a:picLocks noChangeAspect="1"/>
+          </p:cNvPicPr>
+          <p:nvPr/>
+        </p:nvPicPr>
+        <p:blipFill>
+          <a:blip r:embed="rId2"/>
+          <a:stretch>
+            <a:fillRect/>
+          </a:stretch>
+        </p:blipFill>
+        <p:spPr>
+          <a:xfrm>
+            <a:off x="8732520" y="2057400"/>
+            <a:ext cx="2880360" cy="2880360"/>
+          </a:xfrm>
+          <a:prstGeom prst="rect">
+            <a:avLst/>
+          </a:prstGeom>
+        </p:spPr>
+      </p:pic>
     </p:spTree>
   </p:cSld>
   <p:clrMapOvr>
@@ -4719,8 +4839,8 @@
         </p:nvSpPr>
         <p:spPr>
           <a:xfrm>
-            <a:off x="640080" y="685800"/>
-            <a:ext cx="10972800" cy="1463040"/>
+            <a:off x="640080" y="658368"/>
+            <a:ext cx="7863840" cy="1645920"/>
           </a:xfrm>
           <a:prstGeom prst="rect">
             <a:avLst/>
@@ -4734,7 +4854,7 @@
           <a:lstStyle/>
           <a:p>
             <a:r>
-              <a:rPr sz="3200" b="1">
+              <a:rPr sz="3000" b="1">
                 <a:solidFill>
                   <a:srgbClr val="FFFFFF"/>
                 </a:solidFill>
@@ -4753,8 +4873,8 @@
         </p:nvSpPr>
         <p:spPr>
           <a:xfrm>
-            <a:off x="777240" y="2286000"/>
-            <a:ext cx="10607040" cy="4754880"/>
+            <a:off x="777240" y="2331720"/>
+            <a:ext cx="7498079" cy="4754880"/>
           </a:xfrm>
           <a:prstGeom prst="rect">
             <a:avLst/>
@@ -4773,7 +4893,7 @@
               </a:spcAft>
             </a:pPr>
             <a:r>
-              <a:rPr sz="2400" b="0">
+              <a:rPr sz="2200" b="0">
                 <a:solidFill>
                   <a:srgbClr val="FFFFFF"/>
                 </a:solidFill>
@@ -4789,7 +4909,7 @@
               </a:spcAft>
             </a:pPr>
             <a:r>
-              <a:rPr sz="2400" b="0">
+              <a:rPr sz="2200" b="0">
                 <a:solidFill>
                   <a:srgbClr val="FFFFFF"/>
                 </a:solidFill>
@@ -4805,7 +4925,7 @@
               </a:spcAft>
             </a:pPr>
             <a:r>
-              <a:rPr sz="2400" b="0">
+              <a:rPr sz="2200" b="0">
                 <a:solidFill>
                   <a:srgbClr val="FFFFFF"/>
                 </a:solidFill>
@@ -4821,7 +4941,7 @@
               </a:spcAft>
             </a:pPr>
             <a:r>
-              <a:rPr sz="2400" b="0">
+              <a:rPr sz="2200" b="0">
                 <a:solidFill>
                   <a:srgbClr val="FFFFFF"/>
                 </a:solidFill>
@@ -4832,6 +4952,30 @@
           </a:p>
         </p:txBody>
       </p:sp>
+      <p:pic>
+        <p:nvPicPr>
+          <p:cNvPr id="6" name="Picture 5" descr="dw-mapping.jpg"/>
+          <p:cNvPicPr>
+            <a:picLocks noChangeAspect="1"/>
+          </p:cNvPicPr>
+          <p:nvPr/>
+        </p:nvPicPr>
+        <p:blipFill>
+          <a:blip r:embed="rId2"/>
+          <a:stretch>
+            <a:fillRect/>
+          </a:stretch>
+        </p:blipFill>
+        <p:spPr>
+          <a:xfrm>
+            <a:off x="8732520" y="2057400"/>
+            <a:ext cx="2880360" cy="2880360"/>
+          </a:xfrm>
+          <a:prstGeom prst="rect">
+            <a:avLst/>
+          </a:prstGeom>
+        </p:spPr>
+      </p:pic>
     </p:spTree>
   </p:cSld>
   <p:clrMapOvr>
@@ -4935,8 +5079,8 @@
         </p:nvSpPr>
         <p:spPr>
           <a:xfrm>
-            <a:off x="640080" y="685800"/>
-            <a:ext cx="10972800" cy="1463040"/>
+            <a:off x="640080" y="658368"/>
+            <a:ext cx="10972800" cy="1645920"/>
           </a:xfrm>
           <a:prstGeom prst="rect">
             <a:avLst/>
@@ -4950,7 +5094,7 @@
           <a:lstStyle/>
           <a:p>
             <a:r>
-              <a:rPr sz="3200" b="1">
+              <a:rPr sz="3000" b="1">
                 <a:solidFill>
                   <a:srgbClr val="FFFFFF"/>
                 </a:solidFill>
@@ -5248,8 +5392,8 @@
         </p:nvSpPr>
         <p:spPr>
           <a:xfrm>
-            <a:off x="640080" y="685800"/>
-            <a:ext cx="10972800" cy="1463040"/>
+            <a:off x="640080" y="658368"/>
+            <a:ext cx="7863840" cy="1645920"/>
           </a:xfrm>
           <a:prstGeom prst="rect">
             <a:avLst/>
@@ -5263,7 +5407,7 @@
           <a:lstStyle/>
           <a:p>
             <a:r>
-              <a:rPr sz="3200" b="1">
+              <a:rPr sz="3000" b="1">
                 <a:solidFill>
                   <a:srgbClr val="FFFFFF"/>
                 </a:solidFill>
@@ -5282,8 +5426,8 @@
         </p:nvSpPr>
         <p:spPr>
           <a:xfrm>
-            <a:off x="777240" y="2286000"/>
-            <a:ext cx="10607040" cy="4754880"/>
+            <a:off x="777240" y="2331720"/>
+            <a:ext cx="7498079" cy="4754880"/>
           </a:xfrm>
           <a:prstGeom prst="rect">
             <a:avLst/>
@@ -5302,7 +5446,7 @@
               </a:spcAft>
             </a:pPr>
             <a:r>
-              <a:rPr sz="2400" b="0">
+              <a:rPr sz="2200" b="0">
                 <a:solidFill>
                   <a:srgbClr val="FFFFFF"/>
                 </a:solidFill>
@@ -5318,7 +5462,7 @@
               </a:spcAft>
             </a:pPr>
             <a:r>
-              <a:rPr sz="2400" b="0">
+              <a:rPr sz="2200" b="0">
                 <a:solidFill>
                   <a:srgbClr val="FFFFFF"/>
                 </a:solidFill>
@@ -5334,7 +5478,7 @@
               </a:spcAft>
             </a:pPr>
             <a:r>
-              <a:rPr sz="2400" b="0">
+              <a:rPr sz="2200" b="0">
                 <a:solidFill>
                   <a:srgbClr val="FFFFFF"/>
                 </a:solidFill>
@@ -5350,7 +5494,7 @@
               </a:spcAft>
             </a:pPr>
             <a:r>
-              <a:rPr sz="2400" b="0">
+              <a:rPr sz="2200" b="0">
                 <a:solidFill>
                   <a:srgbClr val="FFFFFF"/>
                 </a:solidFill>
@@ -5361,6 +5505,30 @@
           </a:p>
         </p:txBody>
       </p:sp>
+      <p:pic>
+        <p:nvPicPr>
+          <p:cNvPr id="6" name="Picture 5" descr="dw-loop.jpg"/>
+          <p:cNvPicPr>
+            <a:picLocks noChangeAspect="1"/>
+          </p:cNvPicPr>
+          <p:nvPr/>
+        </p:nvPicPr>
+        <p:blipFill>
+          <a:blip r:embed="rId2"/>
+          <a:stretch>
+            <a:fillRect/>
+          </a:stretch>
+        </p:blipFill>
+        <p:spPr>
+          <a:xfrm>
+            <a:off x="8549640" y="1965960"/>
+            <a:ext cx="3108960" cy="3108960"/>
+          </a:xfrm>
+          <a:prstGeom prst="rect">
+            <a:avLst/>
+          </a:prstGeom>
+        </p:spPr>
+      </p:pic>
     </p:spTree>
   </p:cSld>
   <p:clrMapOvr>
